--- a/docs/DB Replication.pptx
+++ b/docs/DB Replication.pptx
@@ -15,10 +15,11 @@
     <p:sldId id="276" r:id="rId9"/>
     <p:sldId id="269" r:id="rId10"/>
     <p:sldId id="271" r:id="rId11"/>
-    <p:sldId id="272" r:id="rId12"/>
-    <p:sldId id="277" r:id="rId13"/>
-    <p:sldId id="278" r:id="rId14"/>
-    <p:sldId id="279" r:id="rId15"/>
+    <p:sldId id="280" r:id="rId12"/>
+    <p:sldId id="272" r:id="rId13"/>
+    <p:sldId id="277" r:id="rId14"/>
+    <p:sldId id="278" r:id="rId15"/>
+    <p:sldId id="279" r:id="rId16"/>
   </p:sldIdLst>
   <p:sldSz cx="12192000" cy="6858000"/>
   <p:notesSz cx="6858000" cy="9144000"/>
@@ -274,7 +275,7 @@
           <a:p>
             <a:fld id="{DD4FD953-4959-7B43-A1AC-A3D86343C92A}" type="datetimeFigureOut">
               <a:rPr lang="en-US" smtClean="0"/>
-              <a:t>4/25/26</a:t>
+              <a:t>9/5/26</a:t>
             </a:fld>
             <a:endParaRPr lang="en-US"/>
           </a:p>
@@ -474,7 +475,7 @@
           <a:p>
             <a:fld id="{DD4FD953-4959-7B43-A1AC-A3D86343C92A}" type="datetimeFigureOut">
               <a:rPr lang="en-US" smtClean="0"/>
-              <a:t>4/25/26</a:t>
+              <a:t>9/5/26</a:t>
             </a:fld>
             <a:endParaRPr lang="en-US"/>
           </a:p>
@@ -684,7 +685,7 @@
           <a:p>
             <a:fld id="{DD4FD953-4959-7B43-A1AC-A3D86343C92A}" type="datetimeFigureOut">
               <a:rPr lang="en-US" smtClean="0"/>
-              <a:t>4/25/26</a:t>
+              <a:t>9/5/26</a:t>
             </a:fld>
             <a:endParaRPr lang="en-US"/>
           </a:p>
@@ -884,7 +885,7 @@
           <a:p>
             <a:fld id="{DD4FD953-4959-7B43-A1AC-A3D86343C92A}" type="datetimeFigureOut">
               <a:rPr lang="en-US" smtClean="0"/>
-              <a:t>4/25/26</a:t>
+              <a:t>9/5/26</a:t>
             </a:fld>
             <a:endParaRPr lang="en-US"/>
           </a:p>
@@ -1160,7 +1161,7 @@
           <a:p>
             <a:fld id="{DD4FD953-4959-7B43-A1AC-A3D86343C92A}" type="datetimeFigureOut">
               <a:rPr lang="en-US" smtClean="0"/>
-              <a:t>4/25/26</a:t>
+              <a:t>9/5/26</a:t>
             </a:fld>
             <a:endParaRPr lang="en-US"/>
           </a:p>
@@ -1428,7 +1429,7 @@
           <a:p>
             <a:fld id="{DD4FD953-4959-7B43-A1AC-A3D86343C92A}" type="datetimeFigureOut">
               <a:rPr lang="en-US" smtClean="0"/>
-              <a:t>4/25/26</a:t>
+              <a:t>9/5/26</a:t>
             </a:fld>
             <a:endParaRPr lang="en-US"/>
           </a:p>
@@ -1843,7 +1844,7 @@
           <a:p>
             <a:fld id="{DD4FD953-4959-7B43-A1AC-A3D86343C92A}" type="datetimeFigureOut">
               <a:rPr lang="en-US" smtClean="0"/>
-              <a:t>4/25/26</a:t>
+              <a:t>9/5/26</a:t>
             </a:fld>
             <a:endParaRPr lang="en-US"/>
           </a:p>
@@ -1985,7 +1986,7 @@
           <a:p>
             <a:fld id="{DD4FD953-4959-7B43-A1AC-A3D86343C92A}" type="datetimeFigureOut">
               <a:rPr lang="en-US" smtClean="0"/>
-              <a:t>4/25/26</a:t>
+              <a:t>9/5/26</a:t>
             </a:fld>
             <a:endParaRPr lang="en-US"/>
           </a:p>
@@ -2098,7 +2099,7 @@
           <a:p>
             <a:fld id="{DD4FD953-4959-7B43-A1AC-A3D86343C92A}" type="datetimeFigureOut">
               <a:rPr lang="en-US" smtClean="0"/>
-              <a:t>4/25/26</a:t>
+              <a:t>9/5/26</a:t>
             </a:fld>
             <a:endParaRPr lang="en-US"/>
           </a:p>
@@ -2411,7 +2412,7 @@
           <a:p>
             <a:fld id="{DD4FD953-4959-7B43-A1AC-A3D86343C92A}" type="datetimeFigureOut">
               <a:rPr lang="en-US" smtClean="0"/>
-              <a:t>4/25/26</a:t>
+              <a:t>9/5/26</a:t>
             </a:fld>
             <a:endParaRPr lang="en-US"/>
           </a:p>
@@ -2700,7 +2701,7 @@
           <a:p>
             <a:fld id="{DD4FD953-4959-7B43-A1AC-A3D86343C92A}" type="datetimeFigureOut">
               <a:rPr lang="en-US" smtClean="0"/>
-              <a:t>4/25/26</a:t>
+              <a:t>9/5/26</a:t>
             </a:fld>
             <a:endParaRPr lang="en-US"/>
           </a:p>
@@ -2943,7 +2944,7 @@
           <a:p>
             <a:fld id="{DD4FD953-4959-7B43-A1AC-A3D86343C92A}" type="datetimeFigureOut">
               <a:rPr lang="en-US" smtClean="0"/>
-              <a:t>4/25/26</a:t>
+              <a:t>9/5/26</a:t>
             </a:fld>
             <a:endParaRPr lang="en-US"/>
           </a:p>
@@ -3683,6 +3684,102 @@
   <p:cSld>
     <p:spTree>
       <p:nvGrpSpPr>
+        <p:cNvPr id="1" name=""/>
+        <p:cNvGrpSpPr/>
+        <p:nvPr/>
+      </p:nvGrpSpPr>
+      <p:grpSpPr>
+        <a:xfrm>
+          <a:off x="0" y="0"/>
+          <a:ext cx="0" cy="0"/>
+          <a:chOff x="0" y="0"/>
+          <a:chExt cx="0" cy="0"/>
+        </a:xfrm>
+      </p:grpSpPr>
+      <p:pic>
+        <p:nvPicPr>
+          <p:cNvPr id="5" name="Picture 4">
+            <a:extLst>
+              <a:ext uri="{FF2B5EF4-FFF2-40B4-BE49-F238E27FC236}">
+                <a16:creationId xmlns:a16="http://schemas.microsoft.com/office/drawing/2014/main" id="{1E23D687-0317-DB6F-C8B2-E3DE6F5A61F4}"/>
+              </a:ext>
+            </a:extLst>
+          </p:cNvPr>
+          <p:cNvPicPr>
+            <a:picLocks noChangeAspect="1"/>
+          </p:cNvPicPr>
+          <p:nvPr/>
+        </p:nvPicPr>
+        <p:blipFill>
+          <a:blip r:embed="rId2"/>
+          <a:stretch>
+            <a:fillRect/>
+          </a:stretch>
+        </p:blipFill>
+        <p:spPr>
+          <a:xfrm>
+            <a:off x="2274693" y="770100"/>
+            <a:ext cx="7642614" cy="5703749"/>
+          </a:xfrm>
+          <a:prstGeom prst="rect">
+            <a:avLst/>
+          </a:prstGeom>
+        </p:spPr>
+      </p:pic>
+      <p:sp>
+        <p:nvSpPr>
+          <p:cNvPr id="6" name="TextBox 5">
+            <a:extLst>
+              <a:ext uri="{FF2B5EF4-FFF2-40B4-BE49-F238E27FC236}">
+                <a16:creationId xmlns:a16="http://schemas.microsoft.com/office/drawing/2014/main" id="{4905CD13-1988-28A8-4DE4-E7F225CA5421}"/>
+              </a:ext>
+            </a:extLst>
+          </p:cNvPr>
+          <p:cNvSpPr txBox="1"/>
+          <p:nvPr/>
+        </p:nvSpPr>
+        <p:spPr>
+          <a:xfrm>
+            <a:off x="543075" y="199485"/>
+            <a:ext cx="11105850" cy="369332"/>
+          </a:xfrm>
+          <a:prstGeom prst="rect">
+            <a:avLst/>
+          </a:prstGeom>
+          <a:noFill/>
+        </p:spPr>
+        <p:txBody>
+          <a:bodyPr wrap="square" rtlCol="0">
+            <a:spAutoFit/>
+          </a:bodyPr>
+          <a:lstStyle/>
+          <a:p>
+            <a:r>
+              <a:rPr lang="en-US" b="1" dirty="0"/>
+              <a:t>2 replication topologies (master-slaves &amp; master-master) + 2 consistency rules</a:t>
+            </a:r>
+            <a:endParaRPr lang="en-US" dirty="0"/>
+          </a:p>
+        </p:txBody>
+      </p:sp>
+    </p:spTree>
+    <p:extLst>
+      <p:ext uri="{BB962C8B-B14F-4D97-AF65-F5344CB8AC3E}">
+        <p14:creationId xmlns:p14="http://schemas.microsoft.com/office/powerpoint/2010/main" val="2170408075"/>
+      </p:ext>
+    </p:extLst>
+  </p:cSld>
+  <p:clrMapOvr>
+    <a:masterClrMapping/>
+  </p:clrMapOvr>
+</p:sld>
+</file>
+
+<file path=ppt/slides/slide12.xml><?xml version="1.0" encoding="utf-8"?>
+<p:sld xmlns:a="http://schemas.openxmlformats.org/drawingml/2006/main" xmlns:r="http://schemas.openxmlformats.org/officeDocument/2006/relationships" xmlns:p="http://schemas.openxmlformats.org/presentationml/2006/main">
+  <p:cSld>
+    <p:spTree>
+      <p:nvGrpSpPr>
         <p:cNvPr id="1" name="">
           <a:extLst>
             <a:ext uri="{FF2B5EF4-FFF2-40B4-BE49-F238E27FC236}">
@@ -3716,7 +3813,7 @@
         <p:spPr>
           <a:xfrm>
             <a:off x="865434" y="567558"/>
-            <a:ext cx="11105850" cy="369332"/>
+            <a:ext cx="11105850" cy="1200329"/>
           </a:xfrm>
           <a:prstGeom prst="rect">
             <a:avLst/>
@@ -3732,6 +3829,21 @@
             <a:r>
               <a:rPr lang="en-US" b="1" dirty="0"/>
               <a:t>Read-Write Quorum</a:t>
+            </a:r>
+          </a:p>
+          <a:p>
+            <a:endParaRPr lang="en-US" b="1" dirty="0"/>
+          </a:p>
+          <a:p>
+            <a:r>
+              <a:rPr lang="en-US" b="1" dirty="0"/>
+              <a:t>Who handle it?</a:t>
+            </a:r>
+          </a:p>
+          <a:p>
+            <a:r>
+              <a:rPr lang="en-US" b="1" dirty="0"/>
+              <a:t>Client or DB?</a:t>
             </a:r>
             <a:endParaRPr lang="en-US" dirty="0"/>
           </a:p>
@@ -3780,7 +3892,7 @@
 </p:sld>
 </file>
 
-<file path=ppt/slides/slide12.xml><?xml version="1.0" encoding="utf-8"?>
+<file path=ppt/slides/slide13.xml><?xml version="1.0" encoding="utf-8"?>
 <p:sld xmlns:a="http://schemas.openxmlformats.org/drawingml/2006/main" xmlns:r="http://schemas.openxmlformats.org/officeDocument/2006/relationships" xmlns:p="http://schemas.openxmlformats.org/presentationml/2006/main">
   <p:cSld>
     <p:spTree>
@@ -3956,8 +4068,28 @@
               <a:rPr lang="en-IE" b="1" dirty="0"/>
             </a:br>
             <a:r>
+              <a:rPr lang="en-IE" u="sng" dirty="0">
+                <a:solidFill>
+                  <a:srgbClr val="FF0000"/>
+                </a:solidFill>
+              </a:rPr>
+              <a:t>A write can pass the quorum gate </a:t>
+            </a:r>
+            <a:r>
               <a:rPr lang="en-IE" u="sng" dirty="0"/>
-              <a:t>A write can pass the quorum gate and still produce a conflict later — these are independent concerns layered on top of each other.</a:t>
+              <a:t>and </a:t>
+            </a:r>
+            <a:r>
+              <a:rPr lang="en-IE" u="sng" dirty="0">
+                <a:solidFill>
+                  <a:srgbClr val="FF0000"/>
+                </a:solidFill>
+              </a:rPr>
+              <a:t>still produce a conflict later</a:t>
+            </a:r>
+            <a:r>
+              <a:rPr lang="en-IE" u="sng" dirty="0"/>
+              <a:t> — these are independent concerns layered on top of each other.</a:t>
             </a:r>
           </a:p>
         </p:txBody>
@@ -3975,7 +4107,7 @@
 </p:sld>
 </file>
 
-<file path=ppt/slides/slide13.xml><?xml version="1.0" encoding="utf-8"?>
+<file path=ppt/slides/slide14.xml><?xml version="1.0" encoding="utf-8"?>
 <p:sld xmlns:a="http://schemas.openxmlformats.org/drawingml/2006/main" xmlns:r="http://schemas.openxmlformats.org/officeDocument/2006/relationships" xmlns:p="http://schemas.openxmlformats.org/presentationml/2006/main">
   <p:cSld>
     <p:spTree>
@@ -4316,7 +4448,7 @@
 </p:sld>
 </file>
 
-<file path=ppt/slides/slide14.xml><?xml version="1.0" encoding="utf-8"?>
+<file path=ppt/slides/slide15.xml><?xml version="1.0" encoding="utf-8"?>
 <p:sld xmlns:a="http://schemas.openxmlformats.org/drawingml/2006/main" xmlns:r="http://schemas.openxmlformats.org/officeDocument/2006/relationships" xmlns:p="http://schemas.openxmlformats.org/presentationml/2006/main">
   <p:cSld>
     <p:spTree>
@@ -4404,8 +4536,16 @@
           <a:lstStyle/>
           <a:p>
             <a:r>
+              <a:rPr lang="en-IE" dirty="0">
+                <a:solidFill>
+                  <a:srgbClr val="FF0000"/>
+                </a:solidFill>
+              </a:rPr>
+              <a:t>Replication + quorum answers Q1 and Q2 very well. But Q3 — the conflict question — requires a completely different mechanism. </a:t>
+            </a:r>
+            <a:r>
               <a:rPr lang="en-IE" dirty="0"/>
-              <a:t>Replication + quorum answers Q1 and Q2 very well. But Q3 — the conflict question — requires a completely different mechanism. No amount of tuning W and R resolves this, because the race condition happens </a:t>
+              <a:t>No amount of tuning W and R resolves this, because the race condition happens </a:t>
             </a:r>
             <a:r>
               <a:rPr lang="en-IE" b="1" dirty="0"/>
@@ -4699,7 +4839,7 @@
             </a:r>
             <a:r>
               <a:rPr lang="en-US" b="1" dirty="0"/>
-              <a:t>AVAIABILITY =&gt; ensure the system remain responsive in case of high load or DB failures.</a:t>
+              <a:t>AVAILABILITY =&gt; ensure the system remain responsive in case of high load or DB failures.</a:t>
             </a:r>
             <a:endParaRPr lang="en-US" dirty="0"/>
           </a:p>
@@ -5465,7 +5605,19 @@
             </a:r>
             <a:r>
               <a:rPr lang="en-IE" dirty="0"/>
-              <a:t> The write with the latest timestamp survives. Simple to implement, but clocks across nodes are never perfectly in sync (clock skew), so the "latest" timestamp can be wrong. Cassandra uses this by default.</a:t>
+              <a:t> The write with the </a:t>
+            </a:r>
+            <a:r>
+              <a:rPr lang="en-IE" dirty="0">
+                <a:solidFill>
+                  <a:srgbClr val="FF0000"/>
+                </a:solidFill>
+              </a:rPr>
+              <a:t>latest timestamp survives</a:t>
+            </a:r>
+            <a:r>
+              <a:rPr lang="en-IE" dirty="0"/>
+              <a:t>. Simple to implement, but clocks across nodes are never perfectly in sync (clock skew), so the "latest" timestamp can be wrong. Cassandra uses this by default.</a:t>
             </a:r>
           </a:p>
           <a:p>
@@ -6098,7 +6250,7 @@
           <a:p>
             <a:r>
               <a:rPr lang="en-US" dirty="0"/>
-              <a:t>In IAM we use a Jenkins job that is triggered every minute that reads if there are conflicts and solve them based on a logic (which can be: merge data, take the latest data, etc.).</a:t>
+              <a:t>In IAM we use a Jenkins job that is triggered every day  that reads if there are conflicts and solve them based on a logic (which can be: merge data, take the latest data, etc.).</a:t>
             </a:r>
           </a:p>
         </p:txBody>
@@ -6153,7 +6305,7 @@
         </p:nvSpPr>
         <p:spPr>
           <a:xfrm>
-            <a:off x="865434" y="567558"/>
+            <a:off x="543075" y="326886"/>
             <a:ext cx="11105850" cy="369332"/>
           </a:xfrm>
           <a:prstGeom prst="rect">
@@ -6189,7 +6341,7 @@
         </p:nvSpPr>
         <p:spPr>
           <a:xfrm>
-            <a:off x="7381847" y="1481959"/>
+            <a:off x="7381847" y="1106928"/>
             <a:ext cx="3581878" cy="2308324"/>
           </a:xfrm>
           <a:prstGeom prst="rect">
@@ -6272,8 +6424,8 @@
         </p:nvSpPr>
         <p:spPr>
           <a:xfrm>
-            <a:off x="1228275" y="1481959"/>
-            <a:ext cx="4878470" cy="2862322"/>
+            <a:off x="1228275" y="1110170"/>
+            <a:ext cx="4878470" cy="3139321"/>
           </a:xfrm>
           <a:prstGeom prst="rect">
             <a:avLst/>
@@ -6288,7 +6440,15 @@
           <a:p>
             <a:r>
               <a:rPr lang="en-US" b="1" dirty="0"/>
-              <a:t>Sync Replication</a:t>
+              <a:t>Sync Replication == </a:t>
+            </a:r>
+            <a:r>
+              <a:rPr lang="en-US" b="1" dirty="0">
+                <a:solidFill>
+                  <a:srgbClr val="FF0000"/>
+                </a:solidFill>
+              </a:rPr>
+              <a:t>QUORUM</a:t>
             </a:r>
           </a:p>
           <a:p>
@@ -6307,7 +6467,7 @@
             </a:pPr>
             <a:r>
               <a:rPr lang="en-US" dirty="0"/>
-              <a:t>Changes are committed to both Leaders and Followers simultaneously </a:t>
+              <a:t>Changes are committed to both Leaders and Followers before returning back to the client’s request </a:t>
             </a:r>
           </a:p>
           <a:p>
@@ -6355,8 +6515,8 @@
         </p:nvSpPr>
         <p:spPr>
           <a:xfrm>
-            <a:off x="531308" y="5013434"/>
-            <a:ext cx="11308160" cy="923330"/>
+            <a:off x="4925510" y="5751071"/>
+            <a:ext cx="6860839" cy="954107"/>
           </a:xfrm>
           <a:prstGeom prst="rect">
             <a:avLst/>
@@ -6364,13 +6524,13 @@
           <a:noFill/>
         </p:spPr>
         <p:txBody>
-          <a:bodyPr wrap="none" rtlCol="0">
+          <a:bodyPr wrap="square" rtlCol="0">
             <a:spAutoFit/>
           </a:bodyPr>
           <a:lstStyle/>
           <a:p>
             <a:r>
-              <a:rPr lang="en-US" dirty="0">
+              <a:rPr lang="en-US" sz="1400" dirty="0">
                 <a:solidFill>
                   <a:srgbClr val="FF0000"/>
                 </a:solidFill>
@@ -6380,7 +6540,7 @@
           </a:p>
           <a:p>
             <a:r>
-              <a:rPr lang="en-US" dirty="0">
+              <a:rPr lang="en-US" sz="1400" dirty="0">
                 <a:solidFill>
                   <a:srgbClr val="FF0000"/>
                 </a:solidFill>
@@ -6388,7 +6548,7 @@
               <a:t>Sync means =&gt; the change is </a:t>
             </a:r>
             <a:r>
-              <a:rPr lang="en-US" b="1" dirty="0">
+              <a:rPr lang="en-US" sz="1400" b="1" dirty="0">
                 <a:solidFill>
                   <a:srgbClr val="FF0000"/>
                 </a:solidFill>
@@ -6396,7 +6556,7 @@
               <a:t>immediately</a:t>
             </a:r>
             <a:r>
-              <a:rPr lang="en-US" dirty="0">
+              <a:rPr lang="en-US" sz="1400" dirty="0">
                 <a:solidFill>
                   <a:srgbClr val="FF0000"/>
                 </a:solidFill>
@@ -6404,7 +6564,7 @@
               <a:t> applied by the node in the DB and </a:t>
             </a:r>
             <a:r>
-              <a:rPr lang="en-US" b="1" dirty="0">
+              <a:rPr lang="en-US" sz="1400" b="1" dirty="0">
                 <a:solidFill>
                   <a:srgbClr val="FF0000"/>
                 </a:solidFill>
@@ -6412,58 +6572,89 @@
               <a:t>saved in the Disk</a:t>
             </a:r>
             <a:r>
-              <a:rPr lang="en-US" dirty="0">
+              <a:rPr lang="en-US" sz="1400" dirty="0">
                 <a:solidFill>
                   <a:srgbClr val="FF0000"/>
                 </a:solidFill>
               </a:rPr>
-              <a:t>!</a:t>
-            </a:r>
-          </a:p>
-          <a:p>
-            <a:r>
-              <a:rPr lang="en-US" dirty="0">
+              <a:t>! The master can contact or ALL the replicas or just the number of nodes to </a:t>
+            </a:r>
+            <a:r>
+              <a:rPr lang="en-US" sz="1400" b="1" dirty="0">
                 <a:solidFill>
                   <a:srgbClr val="FF0000"/>
                 </a:solidFill>
               </a:rPr>
-              <a:t>Async means =&gt; the change is stored in </a:t>
-            </a:r>
-            <a:r>
-              <a:rPr lang="en-US" b="1" dirty="0">
-                <a:solidFill>
-                  <a:srgbClr val="FF0000"/>
-                </a:solidFill>
-              </a:rPr>
-              <a:t>queue</a:t>
-            </a:r>
-            <a:r>
-              <a:rPr lang="en-US" dirty="0">
-                <a:solidFill>
-                  <a:srgbClr val="FF0000"/>
-                </a:solidFill>
-              </a:rPr>
-              <a:t> and </a:t>
-            </a:r>
-            <a:r>
-              <a:rPr lang="en-US" b="1" dirty="0">
-                <a:solidFill>
-                  <a:srgbClr val="FF0000"/>
-                </a:solidFill>
-              </a:rPr>
-              <a:t>only later</a:t>
-            </a:r>
-            <a:r>
-              <a:rPr lang="en-US" dirty="0">
-                <a:solidFill>
-                  <a:srgbClr val="FF0000"/>
-                </a:solidFill>
-              </a:rPr>
-              <a:t> the node will apply the change in the Disk of its DB.</a:t>
-            </a:r>
-          </a:p>
-        </p:txBody>
-      </p:sp>
+              <a:t>reach the quorum =&gt; depends on how you setup the replication.</a:t>
+            </a:r>
+            <a:endParaRPr lang="en-US" sz="1400" dirty="0">
+              <a:solidFill>
+                <a:srgbClr val="FF0000"/>
+              </a:solidFill>
+            </a:endParaRPr>
+          </a:p>
+        </p:txBody>
+      </p:sp>
+      <p:pic>
+        <p:nvPicPr>
+          <p:cNvPr id="7" name="Picture 6">
+            <a:extLst>
+              <a:ext uri="{FF2B5EF4-FFF2-40B4-BE49-F238E27FC236}">
+                <a16:creationId xmlns:a16="http://schemas.microsoft.com/office/drawing/2014/main" id="{A7357790-BAA6-A0CB-8DAA-4427301E2B16}"/>
+              </a:ext>
+            </a:extLst>
+          </p:cNvPr>
+          <p:cNvPicPr>
+            <a:picLocks noChangeAspect="1"/>
+          </p:cNvPicPr>
+          <p:nvPr/>
+        </p:nvPicPr>
+        <p:blipFill>
+          <a:blip r:embed="rId2"/>
+          <a:stretch>
+            <a:fillRect/>
+          </a:stretch>
+        </p:blipFill>
+        <p:spPr>
+          <a:xfrm>
+            <a:off x="6916297" y="3788230"/>
+            <a:ext cx="4734346" cy="1962842"/>
+          </a:xfrm>
+          <a:prstGeom prst="rect">
+            <a:avLst/>
+          </a:prstGeom>
+        </p:spPr>
+      </p:pic>
+      <p:pic>
+        <p:nvPicPr>
+          <p:cNvPr id="9" name="Picture 8">
+            <a:extLst>
+              <a:ext uri="{FF2B5EF4-FFF2-40B4-BE49-F238E27FC236}">
+                <a16:creationId xmlns:a16="http://schemas.microsoft.com/office/drawing/2014/main" id="{19D7ADC7-CDAB-1D65-7E2A-243270D797B7}"/>
+              </a:ext>
+            </a:extLst>
+          </p:cNvPr>
+          <p:cNvPicPr>
+            <a:picLocks noChangeAspect="1"/>
+          </p:cNvPicPr>
+          <p:nvPr/>
+        </p:nvPicPr>
+        <p:blipFill>
+          <a:blip r:embed="rId3"/>
+          <a:stretch>
+            <a:fillRect/>
+          </a:stretch>
+        </p:blipFill>
+        <p:spPr>
+          <a:xfrm>
+            <a:off x="200620" y="4420313"/>
+            <a:ext cx="4716622" cy="2040777"/>
+          </a:xfrm>
+          <a:prstGeom prst="rect">
+            <a:avLst/>
+          </a:prstGeom>
+        </p:spPr>
+      </p:pic>
     </p:spTree>
     <p:extLst>
       <p:ext uri="{BB962C8B-B14F-4D97-AF65-F5344CB8AC3E}">
